--- a/powerpoint/Practica1PowerPoint.pptx
+++ b/powerpoint/Practica1PowerPoint.pptx
@@ -5,14 +5,15 @@
     <p:sldMasterId id="2147483648" r:id="rId1"/>
   </p:sldMasterIdLst>
   <p:notesMasterIdLst>
-    <p:notesMasterId r:id="rId7"/>
+    <p:notesMasterId r:id="rId8"/>
   </p:notesMasterIdLst>
   <p:sldIdLst>
     <p:sldId id="256" r:id="rId2"/>
     <p:sldId id="257" r:id="rId3"/>
     <p:sldId id="258" r:id="rId4"/>
     <p:sldId id="259" r:id="rId5"/>
-    <p:sldId id="260" r:id="rId6"/>
+    <p:sldId id="261" r:id="rId6"/>
+    <p:sldId id="260" r:id="rId7"/>
   </p:sldIdLst>
   <p:sldSz cx="12192000" cy="6858000"/>
   <p:notesSz cx="6858000" cy="9144000"/>
@@ -204,7 +205,7 @@
           <a:p>
             <a:fld id="{DC567256-224F-48EC-8CEC-1D4F7F8CECBC}" type="datetimeFigureOut">
               <a:rPr lang="es-BO" smtClean="0"/>
-              <a:t>21/5/2026</a:t>
+              <a:t>28/5/2026</a:t>
             </a:fld>
             <a:endParaRPr lang="es-BO"/>
           </a:p>
@@ -541,7 +542,7 @@
           <a:p>
             <a:fld id="{0E3F5009-34FA-4C91-A4F1-8A7410B45CF1}" type="slidenum">
               <a:rPr lang="es-BO" smtClean="0"/>
-              <a:t>5</a:t>
+              <a:t>6</a:t>
             </a:fld>
             <a:endParaRPr lang="es-BO"/>
           </a:p>
@@ -709,7 +710,7 @@
           <a:p>
             <a:fld id="{3ECE789D-ECA0-472D-B17A-5CD51070645A}" type="datetimeFigureOut">
               <a:rPr lang="es-BO" smtClean="0"/>
-              <a:t>21/5/2026</a:t>
+              <a:t>28/5/2026</a:t>
             </a:fld>
             <a:endParaRPr lang="es-BO"/>
           </a:p>
@@ -909,7 +910,7 @@
           <a:p>
             <a:fld id="{3ECE789D-ECA0-472D-B17A-5CD51070645A}" type="datetimeFigureOut">
               <a:rPr lang="es-BO" smtClean="0"/>
-              <a:t>21/5/2026</a:t>
+              <a:t>28/5/2026</a:t>
             </a:fld>
             <a:endParaRPr lang="es-BO"/>
           </a:p>
@@ -1119,7 +1120,7 @@
           <a:p>
             <a:fld id="{3ECE789D-ECA0-472D-B17A-5CD51070645A}" type="datetimeFigureOut">
               <a:rPr lang="es-BO" smtClean="0"/>
-              <a:t>21/5/2026</a:t>
+              <a:t>28/5/2026</a:t>
             </a:fld>
             <a:endParaRPr lang="es-BO"/>
           </a:p>
@@ -1319,7 +1320,7 @@
           <a:p>
             <a:fld id="{3ECE789D-ECA0-472D-B17A-5CD51070645A}" type="datetimeFigureOut">
               <a:rPr lang="es-BO" smtClean="0"/>
-              <a:t>21/5/2026</a:t>
+              <a:t>28/5/2026</a:t>
             </a:fld>
             <a:endParaRPr lang="es-BO"/>
           </a:p>
@@ -1595,7 +1596,7 @@
           <a:p>
             <a:fld id="{3ECE789D-ECA0-472D-B17A-5CD51070645A}" type="datetimeFigureOut">
               <a:rPr lang="es-BO" smtClean="0"/>
-              <a:t>21/5/2026</a:t>
+              <a:t>28/5/2026</a:t>
             </a:fld>
             <a:endParaRPr lang="es-BO"/>
           </a:p>
@@ -1863,7 +1864,7 @@
           <a:p>
             <a:fld id="{3ECE789D-ECA0-472D-B17A-5CD51070645A}" type="datetimeFigureOut">
               <a:rPr lang="es-BO" smtClean="0"/>
-              <a:t>21/5/2026</a:t>
+              <a:t>28/5/2026</a:t>
             </a:fld>
             <a:endParaRPr lang="es-BO"/>
           </a:p>
@@ -2278,7 +2279,7 @@
           <a:p>
             <a:fld id="{3ECE789D-ECA0-472D-B17A-5CD51070645A}" type="datetimeFigureOut">
               <a:rPr lang="es-BO" smtClean="0"/>
-              <a:t>21/5/2026</a:t>
+              <a:t>28/5/2026</a:t>
             </a:fld>
             <a:endParaRPr lang="es-BO"/>
           </a:p>
@@ -2420,7 +2421,7 @@
           <a:p>
             <a:fld id="{3ECE789D-ECA0-472D-B17A-5CD51070645A}" type="datetimeFigureOut">
               <a:rPr lang="es-BO" smtClean="0"/>
-              <a:t>21/5/2026</a:t>
+              <a:t>28/5/2026</a:t>
             </a:fld>
             <a:endParaRPr lang="es-BO"/>
           </a:p>
@@ -2533,7 +2534,7 @@
           <a:p>
             <a:fld id="{3ECE789D-ECA0-472D-B17A-5CD51070645A}" type="datetimeFigureOut">
               <a:rPr lang="es-BO" smtClean="0"/>
-              <a:t>21/5/2026</a:t>
+              <a:t>28/5/2026</a:t>
             </a:fld>
             <a:endParaRPr lang="es-BO"/>
           </a:p>
@@ -2846,7 +2847,7 @@
           <a:p>
             <a:fld id="{3ECE789D-ECA0-472D-B17A-5CD51070645A}" type="datetimeFigureOut">
               <a:rPr lang="es-BO" smtClean="0"/>
-              <a:t>21/5/2026</a:t>
+              <a:t>28/5/2026</a:t>
             </a:fld>
             <a:endParaRPr lang="es-BO"/>
           </a:p>
@@ -3135,7 +3136,7 @@
           <a:p>
             <a:fld id="{3ECE789D-ECA0-472D-B17A-5CD51070645A}" type="datetimeFigureOut">
               <a:rPr lang="es-BO" smtClean="0"/>
-              <a:t>21/5/2026</a:t>
+              <a:t>28/5/2026</a:t>
             </a:fld>
             <a:endParaRPr lang="es-BO"/>
           </a:p>
@@ -3378,7 +3379,7 @@
           <a:p>
             <a:fld id="{3ECE789D-ECA0-472D-B17A-5CD51070645A}" type="datetimeFigureOut">
               <a:rPr lang="es-BO" smtClean="0"/>
-              <a:t>21/5/2026</a:t>
+              <a:t>28/5/2026</a:t>
             </a:fld>
             <a:endParaRPr lang="es-BO"/>
           </a:p>
@@ -3899,7 +3900,7 @@
                   <a:schemeClr val="bg1"/>
                 </a:solidFill>
               </a:rPr>
-              <a:t>Infraestructura y software</a:t>
+              <a:t>AUDITORIA INFORMATICA Y AUTOMATIZACION DE DATOS</a:t>
             </a:r>
             <a:br>
               <a:rPr lang="es-MX" dirty="0">
@@ -3953,7 +3954,7 @@
                   <a:schemeClr val="bg1"/>
                 </a:solidFill>
               </a:rPr>
-              <a:t>Soporte Técnico, Redes estructuradas y Desarrollo Web</a:t>
+              <a:t>Control Presupuestario con Lógica Condicional</a:t>
             </a:r>
             <a:endParaRPr lang="es-BO" dirty="0">
               <a:solidFill>
@@ -4230,7 +4231,7 @@
                   <a:srgbClr val="00B0F0"/>
                 </a:solidFill>
               </a:rPr>
-              <a:t>Seguridad e Interconexión de Servidores</a:t>
+              <a:t>Formula Función SI</a:t>
             </a:r>
             <a:endParaRPr lang="es-BO" dirty="0">
               <a:solidFill>
@@ -4240,35 +4241,69 @@
           </a:p>
         </p:txBody>
       </p:sp>
-      <p:pic>
-        <p:nvPicPr>
-          <p:cNvPr id="4" name="Marcador de contenido 3">
-            <a:extLst>
-              <a:ext uri="{FF2B5EF4-FFF2-40B4-BE49-F238E27FC236}">
-                <a16:creationId xmlns:a16="http://schemas.microsoft.com/office/drawing/2014/main" id="{2F6A3C60-D221-40CC-B6ED-8A6500223FF1}"/>
-              </a:ext>
-            </a:extLst>
-          </p:cNvPr>
-          <p:cNvPicPr>
-            <a:picLocks noGrp="1" noChangeAspect="1"/>
-          </p:cNvPicPr>
-          <p:nvPr>
-            <p:ph idx="1"/>
-          </p:nvPr>
-        </p:nvPicPr>
-        <p:blipFill>
-          <a:blip r:embed="rId2"/>
-          <a:stretch>
-            <a:fillRect/>
-          </a:stretch>
-        </p:blipFill>
-        <p:spPr>
-          <a:xfrm>
-            <a:off x="2834231" y="1825625"/>
-            <a:ext cx="6523537" cy="4351338"/>
-          </a:xfrm>
-        </p:spPr>
-      </p:pic>
+      <p:graphicFrame>
+        <p:nvGraphicFramePr>
+          <p:cNvPr id="5" name="Objeto 4">
+            <a:extLst>
+              <a:ext uri="{FF2B5EF4-FFF2-40B4-BE49-F238E27FC236}">
+                <a16:creationId xmlns:a16="http://schemas.microsoft.com/office/drawing/2014/main" id="{B80E5643-19D2-4327-9CDE-09025761C358}"/>
+              </a:ext>
+            </a:extLst>
+          </p:cNvPr>
+          <p:cNvGraphicFramePr>
+            <a:graphicFrameLocks noChangeAspect="1"/>
+          </p:cNvGraphicFramePr>
+          <p:nvPr>
+            <p:extLst>
+              <p:ext uri="{D42A27DB-BD31-4B8C-83A1-F6EECF244321}">
+                <p14:modId xmlns:p14="http://schemas.microsoft.com/office/powerpoint/2010/main" val="160045584"/>
+              </p:ext>
+            </p:extLst>
+          </p:nvPr>
+        </p:nvGraphicFramePr>
+        <p:xfrm>
+          <a:off x="1310054" y="1301262"/>
+          <a:ext cx="9768254" cy="5191613"/>
+        </p:xfrm>
+        <a:graphic>
+          <a:graphicData uri="http://schemas.openxmlformats.org/presentationml/2006/ole">
+            <mc:AlternateContent xmlns:mc="http://schemas.openxmlformats.org/markup-compatibility/2006">
+              <mc:Choice xmlns:v="urn:schemas-microsoft-com:vml" Requires="v">
+                <p:oleObj spid="_x0000_s2053" name="Worksheet" r:id="rId3" imgW="13487313" imgH="9239186" progId="Excel.Sheet.12">
+                  <p:link updateAutomatic="1"/>
+                </p:oleObj>
+              </mc:Choice>
+              <mc:Fallback>
+                <p:oleObj name="Worksheet" r:id="rId3" imgW="13487313" imgH="9239186" progId="Excel.Sheet.12">
+                  <p:link updateAutomatic="1"/>
+                  <p:pic>
+                    <p:nvPicPr>
+                      <p:cNvPr id="0" name=""/>
+                      <p:cNvPicPr/>
+                      <p:nvPr/>
+                    </p:nvPicPr>
+                    <p:blipFill>
+                      <a:blip r:embed="rId4"/>
+                      <a:stretch>
+                        <a:fillRect/>
+                      </a:stretch>
+                    </p:blipFill>
+                    <p:spPr>
+                      <a:xfrm>
+                        <a:off x="1310054" y="1301262"/>
+                        <a:ext cx="9768254" cy="5191613"/>
+                      </a:xfrm>
+                      <a:prstGeom prst="rect">
+                        <a:avLst/>
+                      </a:prstGeom>
+                    </p:spPr>
+                  </p:pic>
+                </p:oleObj>
+              </mc:Fallback>
+            </mc:AlternateContent>
+          </a:graphicData>
+        </a:graphic>
+      </p:graphicFrame>
     </p:spTree>
     <p:extLst>
       <p:ext uri="{BB962C8B-B14F-4D97-AF65-F5344CB8AC3E}">
@@ -4339,8 +4374,8 @@
         </p:nvSpPr>
         <p:spPr>
           <a:xfrm>
-            <a:off x="1524000" y="1122363"/>
-            <a:ext cx="9144000" cy="2367458"/>
+            <a:off x="1406769" y="448409"/>
+            <a:ext cx="9261231" cy="914399"/>
           </a:xfrm>
           <a:solidFill>
             <a:schemeClr val="tx1">
@@ -4373,22 +4408,7 @@
                   <a:srgbClr val="00B0F0"/>
                 </a:solidFill>
               </a:rPr>
-              <a:t>Costos de Equipamiento e Insumos</a:t>
-            </a:r>
-            <a:br>
-              <a:rPr lang="es-MX" dirty="0">
-                <a:solidFill>
-                  <a:srgbClr val="00B0F0"/>
-                </a:solidFill>
-              </a:rPr>
-            </a:br>
-            <a:r>
-              <a:rPr lang="es-MX" sz="2000" dirty="0">
-                <a:solidFill>
-                  <a:schemeClr val="bg1"/>
-                </a:solidFill>
-              </a:rPr>
-              <a:t>Control de costos para la implementación de un laboratorio informático</a:t>
+              <a:t>Función SI(Y-0)</a:t>
             </a:r>
             <a:endParaRPr lang="es-BO" dirty="0">
               <a:solidFill>
@@ -4400,10 +4420,10 @@
       </p:sp>
       <p:graphicFrame>
         <p:nvGraphicFramePr>
-          <p:cNvPr id="6" name="Objeto 5">
-            <a:extLst>
-              <a:ext uri="{FF2B5EF4-FFF2-40B4-BE49-F238E27FC236}">
-                <a16:creationId xmlns:a16="http://schemas.microsoft.com/office/drawing/2014/main" id="{F54E358B-FB3B-4B80-B5E7-28243979C7FA}"/>
+          <p:cNvPr id="3" name="Objeto 2">
+            <a:extLst>
+              <a:ext uri="{FF2B5EF4-FFF2-40B4-BE49-F238E27FC236}">
+                <a16:creationId xmlns:a16="http://schemas.microsoft.com/office/drawing/2014/main" id="{271BDD3E-F8EC-4422-B423-0AB8E4DCDFBD}"/>
               </a:ext>
             </a:extLst>
           </p:cNvPr>
@@ -4413,25 +4433,25 @@
           <p:nvPr>
             <p:extLst>
               <p:ext uri="{D42A27DB-BD31-4B8C-83A1-F6EECF244321}">
-                <p14:modId xmlns:p14="http://schemas.microsoft.com/office/powerpoint/2010/main" val="2008478460"/>
+                <p14:modId xmlns:p14="http://schemas.microsoft.com/office/powerpoint/2010/main" val="2808219606"/>
               </p:ext>
             </p:extLst>
           </p:nvPr>
         </p:nvGraphicFramePr>
         <p:xfrm>
-          <a:off x="2761375" y="3630124"/>
-          <a:ext cx="6003839" cy="2105513"/>
+          <a:off x="1246188" y="1449388"/>
+          <a:ext cx="9702800" cy="5110162"/>
         </p:xfrm>
         <a:graphic>
           <a:graphicData uri="http://schemas.openxmlformats.org/presentationml/2006/ole">
             <mc:AlternateContent xmlns:mc="http://schemas.openxmlformats.org/markup-compatibility/2006">
               <mc:Choice xmlns:v="urn:schemas-microsoft-com:vml" Requires="v">
-                <p:oleObj spid="_x0000_s1030" name="Worksheet" r:id="rId3" imgW="2743200" imgH="961974" progId="Excel.Sheet.12">
+                <p:oleObj spid="_x0000_s1036" name="Worksheet" r:id="rId3" imgW="16268686" imgH="9239186" progId="Excel.Sheet.12">
                   <p:link updateAutomatic="1"/>
                 </p:oleObj>
               </mc:Choice>
               <mc:Fallback>
-                <p:oleObj name="Worksheet" r:id="rId3" imgW="2743200" imgH="961974" progId="Excel.Sheet.12">
+                <p:oleObj name="Worksheet" r:id="rId3" imgW="16268686" imgH="9239186" progId="Excel.Sheet.12">
                   <p:link updateAutomatic="1"/>
                   <p:pic>
                     <p:nvPicPr>
@@ -4447,8 +4467,8 @@
                     </p:blipFill>
                     <p:spPr>
                       <a:xfrm>
-                        <a:off x="2761375" y="3630124"/>
-                        <a:ext cx="6003839" cy="2105513"/>
+                        <a:off x="1246188" y="1449388"/>
+                        <a:ext cx="9702800" cy="5110162"/>
                       </a:xfrm>
                       <a:prstGeom prst="rect">
                         <a:avLst/>
@@ -4475,6 +4495,153 @@
 </file>
 
 <file path=ppt/slides/slide5.xml><?xml version="1.0" encoding="utf-8"?>
+<p:sld xmlns:a="http://schemas.openxmlformats.org/drawingml/2006/main" xmlns:r="http://schemas.openxmlformats.org/officeDocument/2006/relationships" xmlns:p="http://schemas.openxmlformats.org/presentationml/2006/main">
+  <p:cSld>
+    <p:bg>
+      <p:bgPr>
+        <a:solidFill>
+          <a:schemeClr val="tx1">
+            <a:lumMod val="75000"/>
+            <a:lumOff val="25000"/>
+          </a:schemeClr>
+        </a:solidFill>
+        <a:effectLst/>
+      </p:bgPr>
+    </p:bg>
+    <p:spTree>
+      <p:nvGrpSpPr>
+        <p:cNvPr id="1" name=""/>
+        <p:cNvGrpSpPr/>
+        <p:nvPr/>
+      </p:nvGrpSpPr>
+      <p:grpSpPr>
+        <a:xfrm>
+          <a:off x="0" y="0"/>
+          <a:ext cx="0" cy="0"/>
+          <a:chOff x="0" y="0"/>
+          <a:chExt cx="0" cy="0"/>
+        </a:xfrm>
+      </p:grpSpPr>
+      <p:sp>
+        <p:nvSpPr>
+          <p:cNvPr id="2" name="Título 1">
+            <a:extLst>
+              <a:ext uri="{FF2B5EF4-FFF2-40B4-BE49-F238E27FC236}">
+                <a16:creationId xmlns:a16="http://schemas.microsoft.com/office/drawing/2014/main" id="{0F7E8AE1-63B3-4E2B-B03A-1CE6FB66D217}"/>
+              </a:ext>
+            </a:extLst>
+          </p:cNvPr>
+          <p:cNvSpPr>
+            <a:spLocks noGrp="1"/>
+          </p:cNvSpPr>
+          <p:nvPr>
+            <p:ph type="title"/>
+          </p:nvPr>
+        </p:nvSpPr>
+        <p:spPr>
+          <a:xfrm>
+            <a:off x="838200" y="365125"/>
+            <a:ext cx="10515600" cy="978483"/>
+          </a:xfrm>
+        </p:spPr>
+        <p:txBody>
+          <a:bodyPr/>
+          <a:lstStyle/>
+          <a:p>
+            <a:pPr algn="ctr"/>
+            <a:r>
+              <a:rPr lang="es-MX" dirty="0">
+                <a:solidFill>
+                  <a:srgbClr val="00B0F0"/>
+                </a:solidFill>
+              </a:rPr>
+              <a:t>RESUMEN DE INVERSION POR CATEGORIA</a:t>
+            </a:r>
+            <a:endParaRPr lang="es-BO" dirty="0">
+              <a:solidFill>
+                <a:srgbClr val="00B0F0"/>
+              </a:solidFill>
+            </a:endParaRPr>
+          </a:p>
+        </p:txBody>
+      </p:sp>
+      <p:graphicFrame>
+        <p:nvGraphicFramePr>
+          <p:cNvPr id="4" name="Objeto 3">
+            <a:extLst>
+              <a:ext uri="{FF2B5EF4-FFF2-40B4-BE49-F238E27FC236}">
+                <a16:creationId xmlns:a16="http://schemas.microsoft.com/office/drawing/2014/main" id="{9F50C6F1-5030-4EF7-9BD7-8DD23DC20F61}"/>
+              </a:ext>
+            </a:extLst>
+          </p:cNvPr>
+          <p:cNvGraphicFramePr>
+            <a:graphicFrameLocks noChangeAspect="1"/>
+          </p:cNvGraphicFramePr>
+          <p:nvPr>
+            <p:extLst>
+              <p:ext uri="{D42A27DB-BD31-4B8C-83A1-F6EECF244321}">
+                <p14:modId xmlns:p14="http://schemas.microsoft.com/office/powerpoint/2010/main" val="1612714565"/>
+              </p:ext>
+            </p:extLst>
+          </p:nvPr>
+        </p:nvGraphicFramePr>
+        <p:xfrm>
+          <a:off x="3965510" y="1651518"/>
+          <a:ext cx="5029200" cy="3368351"/>
+        </p:xfrm>
+        <a:graphic>
+          <a:graphicData uri="http://schemas.openxmlformats.org/presentationml/2006/ole">
+            <mc:AlternateContent xmlns:mc="http://schemas.openxmlformats.org/markup-compatibility/2006">
+              <mc:Choice xmlns:v="urn:schemas-microsoft-com:vml" Requires="v">
+                <p:oleObj spid="_x0000_s3075" name="Worksheet" r:id="rId3" imgW="2447885" imgH="1638274" progId="Excel.Sheet.12">
+                  <p:link updateAutomatic="1"/>
+                </p:oleObj>
+              </mc:Choice>
+              <mc:Fallback>
+                <p:oleObj name="Worksheet" r:id="rId3" imgW="2447885" imgH="1638274" progId="Excel.Sheet.12">
+                  <p:link updateAutomatic="1"/>
+                  <p:pic>
+                    <p:nvPicPr>
+                      <p:cNvPr id="0" name=""/>
+                      <p:cNvPicPr/>
+                      <p:nvPr/>
+                    </p:nvPicPr>
+                    <p:blipFill>
+                      <a:blip r:embed="rId4"/>
+                      <a:stretch>
+                        <a:fillRect/>
+                      </a:stretch>
+                    </p:blipFill>
+                    <p:spPr>
+                      <a:xfrm>
+                        <a:off x="3965510" y="1651518"/>
+                        <a:ext cx="5029200" cy="3368351"/>
+                      </a:xfrm>
+                      <a:prstGeom prst="rect">
+                        <a:avLst/>
+                      </a:prstGeom>
+                    </p:spPr>
+                  </p:pic>
+                </p:oleObj>
+              </mc:Fallback>
+            </mc:AlternateContent>
+          </a:graphicData>
+        </a:graphic>
+      </p:graphicFrame>
+    </p:spTree>
+    <p:extLst>
+      <p:ext uri="{BB962C8B-B14F-4D97-AF65-F5344CB8AC3E}">
+        <p14:creationId xmlns:p14="http://schemas.microsoft.com/office/powerpoint/2010/main" val="868748589"/>
+      </p:ext>
+    </p:extLst>
+  </p:cSld>
+  <p:clrMapOvr>
+    <a:masterClrMapping/>
+  </p:clrMapOvr>
+</p:sld>
+</file>
+
+<file path=ppt/slides/slide6.xml><?xml version="1.0" encoding="utf-8"?>
 <p:sld xmlns:a="http://schemas.openxmlformats.org/drawingml/2006/main" xmlns:r="http://schemas.openxmlformats.org/officeDocument/2006/relationships" xmlns:p="http://schemas.openxmlformats.org/presentationml/2006/main">
   <p:cSld>
     <p:bg>
